--- a/materials/ノーマルステージ画面.pptx
+++ b/materials/ノーマルステージ画面.pptx
@@ -3910,14 +3910,16 @@
           </a:prstGeom>
         </p:spPr>
         <p:style>
-          <a:lnRef idx="3">
-            <a:schemeClr val="lt1"/>
+          <a:lnRef idx="2">
+            <a:schemeClr val="accent1">
+              <a:shade val="15000"/>
+            </a:schemeClr>
           </a:lnRef>
           <a:fillRef idx="1">
-            <a:schemeClr val="accent5"/>
+            <a:schemeClr val="accent1"/>
           </a:fillRef>
-          <a:effectRef idx="1">
-            <a:schemeClr val="accent5"/>
+          <a:effectRef idx="0">
+            <a:schemeClr val="accent1"/>
           </a:effectRef>
           <a:fontRef idx="minor">
             <a:schemeClr val="lt1"/>
